--- a/management-seminars/week03_stakeholder_alignment.pptx
+++ b/management-seminars/week03_stakeholder_alignment.pptx
@@ -11,6 +11,7 @@
     <p:sldId id="269" r:id="rId20"/>
     <p:sldId id="270" r:id="rId21"/>
     <p:sldId id="271" r:id="rId22"/>
+    <p:sldId id="272" r:id="rId11"/>
   </p:sldIdLst>
   <p:notesMasterIdLst>
     <p:notesMasterId r:id="rId12"/>
@@ -857,6 +858,76 @@
           <a:p>
             <a:r>
               <a:t>Bad news delivered first in a large meeting puts leaders on the defensive. When new requests arrive, ask how they relate to the agreed goal and what should move to make room. Staff turnover is common; a decision log lets a new sponsor see why choices were made.</a:t>
+            </a:r>
+          </a:p>
+        </p:txBody>
+      </p:sp>
+      <p:sp>
+        <p:nvSpPr>
+          <p:cNvPr id="4" name="Slide Number Placeholder 3"/>
+          <p:cNvSpPr>
+            <a:spLocks noGrp="1"/>
+          </p:cNvSpPr>
+          <p:nvPr>
+            <p:ph type="sldNum" idx="5" sz="quarter"/>
+          </p:nvPr>
+        </p:nvSpPr>
+        <p:spPr/>
+      </p:sp>
+    </p:spTree>
+  </p:cSld>
+  <p:clrMapOvr>
+    <a:masterClrMapping/>
+  </p:clrMapOvr>
+</p:notes>
+</file>
+
+<file path=ppt/notesSlides/notesSlide7.xml><?xml version="1.0" encoding="utf-8"?>
+<p:notes xmlns:a="http://schemas.openxmlformats.org/drawingml/2006/main" xmlns:p="http://schemas.openxmlformats.org/presentationml/2006/main" xmlns:r="http://schemas.openxmlformats.org/officeDocument/2006/relationships">
+  <p:cSld>
+    <p:spTree>
+      <p:nvGrpSpPr>
+        <p:cNvPr id="1" name=""/>
+        <p:cNvGrpSpPr/>
+        <p:nvPr/>
+      </p:nvGrpSpPr>
+      <p:grpSpPr>
+        <a:xfrm>
+          <a:off x="0" y="0"/>
+          <a:ext cx="0" cy="0"/>
+          <a:chOff x="0" y="0"/>
+          <a:chExt cx="0" cy="0"/>
+        </a:xfrm>
+      </p:grpSpPr>
+      <p:sp>
+        <p:nvSpPr>
+          <p:cNvPr id="2" name="Slide Image Placeholder 1"/>
+          <p:cNvSpPr>
+            <a:spLocks noGrp="1"/>
+          </p:cNvSpPr>
+          <p:nvPr>
+            <p:ph type="sldImg" idx="2"/>
+          </p:nvPr>
+        </p:nvSpPr>
+        <p:spPr/>
+      </p:sp>
+      <p:sp>
+        <p:nvSpPr>
+          <p:cNvPr id="3" name="Notes Placeholder 2"/>
+          <p:cNvSpPr>
+            <a:spLocks noGrp="1"/>
+          </p:cNvSpPr>
+          <p:nvPr>
+            <p:ph type="body" idx="3" sz="quarter"/>
+          </p:nvPr>
+        </p:nvSpPr>
+        <p:spPr/>
+        <p:txBody>
+          <a:bodyPr/>
+          <a:lstStyle/>
+          <a:p>
+            <a:r>
+              <a:t>Give students a few minutes to write an answer drawn from their own experience and career, then ask two or three to share. Connect their examples back to this seminar's content. In an online section, post the same question to the discussion board.</a:t>
             </a:r>
           </a:p>
         </p:txBody>
@@ -1506,7 +1577,7 @@
 </p:sldMaster>
 </file>
 
-<file path=ppt/slides/slide11.xml><?xml version="1.0" encoding="utf-8"?>
+<file path=ppt/slides/slide1.xml><?xml version="1.0" encoding="utf-8"?>
 <p:sld xmlns:a="http://schemas.openxmlformats.org/drawingml/2006/main" xmlns:p="http://schemas.openxmlformats.org/presentationml/2006/main" xmlns:r="http://schemas.openxmlformats.org/officeDocument/2006/relationships">
   <p:cSld>
     <p:spTree>
@@ -1600,7 +1671,7 @@
 </p:sld>
 </file>
 
-<file path=ppt/slides/slide12.xml><?xml version="1.0" encoding="utf-8"?>
+<file path=ppt/slides/slide2.xml><?xml version="1.0" encoding="utf-8"?>
 <p:sld xmlns:a="http://schemas.openxmlformats.org/drawingml/2006/main" xmlns:p="http://schemas.openxmlformats.org/presentationml/2006/main" xmlns:r="http://schemas.openxmlformats.org/officeDocument/2006/relationships">
   <p:cSld>
     <p:spTree>
@@ -1797,7 +1868,7 @@
 </p:sld>
 </file>
 
-<file path=ppt/slides/slide13.xml><?xml version="1.0" encoding="utf-8"?>
+<file path=ppt/slides/slide3.xml><?xml version="1.0" encoding="utf-8"?>
 <p:sld xmlns:a="http://schemas.openxmlformats.org/drawingml/2006/main" xmlns:p="http://schemas.openxmlformats.org/presentationml/2006/main" xmlns:r="http://schemas.openxmlformats.org/officeDocument/2006/relationships">
   <p:cSld>
     <p:spTree>
@@ -1994,7 +2065,7 @@
 </p:sld>
 </file>
 
-<file path=ppt/slides/slide14.xml><?xml version="1.0" encoding="utf-8"?>
+<file path=ppt/slides/slide4.xml><?xml version="1.0" encoding="utf-8"?>
 <p:sld xmlns:a="http://schemas.openxmlformats.org/drawingml/2006/main" xmlns:p="http://schemas.openxmlformats.org/presentationml/2006/main" xmlns:r="http://schemas.openxmlformats.org/officeDocument/2006/relationships">
   <p:cSld>
     <p:spTree>
@@ -2191,7 +2262,7 @@
 </p:sld>
 </file>
 
-<file path=ppt/slides/slide15.xml><?xml version="1.0" encoding="utf-8"?>
+<file path=ppt/slides/slide5.xml><?xml version="1.0" encoding="utf-8"?>
 <p:sld xmlns:a="http://schemas.openxmlformats.org/drawingml/2006/main" xmlns:p="http://schemas.openxmlformats.org/presentationml/2006/main" xmlns:r="http://schemas.openxmlformats.org/officeDocument/2006/relationships">
   <p:cSld>
     <p:spTree>
@@ -2370,7 +2441,7 @@
 </p:sld>
 </file>
 
-<file path=ppt/slides/slide16.xml><?xml version="1.0" encoding="utf-8"?>
+<file path=ppt/slides/slide6.xml><?xml version="1.0" encoding="utf-8"?>
 <p:sld xmlns:a="http://schemas.openxmlformats.org/drawingml/2006/main" xmlns:p="http://schemas.openxmlformats.org/presentationml/2006/main" xmlns:r="http://schemas.openxmlformats.org/officeDocument/2006/relationships">
   <p:cSld>
     <p:spTree>
@@ -2536,6 +2607,167 @@
             <a:fld id="{F7021451-1387-4CA6-816F-3879F97B5CBC}" type="slidenum">
               <a:rPr b="0" lang="en-US"/>
               <a:t>6</a:t>
+            </a:fld>
+            <a:endParaRPr lang="en-US"/>
+          </a:p>
+        </p:txBody>
+      </p:sp>
+    </p:spTree>
+  </p:cSld>
+  <p:clrMapOvr>
+    <a:masterClrMapping/>
+  </p:clrMapOvr>
+</p:sld>
+</file>
+
+<file path=ppt/slides/slide7.xml><?xml version="1.0" encoding="utf-8"?>
+<p:sld xmlns:a="http://schemas.openxmlformats.org/drawingml/2006/main" xmlns:p="http://schemas.openxmlformats.org/presentationml/2006/main" xmlns:r="http://schemas.openxmlformats.org/officeDocument/2006/relationships">
+  <p:cSld>
+    <p:spTree>
+      <p:nvGrpSpPr>
+        <p:cNvPr id="1" name=""/>
+        <p:cNvGrpSpPr/>
+        <p:nvPr/>
+      </p:nvGrpSpPr>
+      <p:grpSpPr/>
+      <p:sp>
+        <p:nvSpPr>
+          <p:cNvPr id="2" name="Text 0"/>
+          <p:cNvSpPr/>
+          <p:nvPr>
+            <p:ph idx="100" type="title" hasCustomPrompt="1"/>
+          </p:nvPr>
+        </p:nvSpPr>
+        <p:spPr>
+          <a:xfrm>
+            <a:off x="731520" y="457200"/>
+            <a:ext cx="10698480" cy="822960"/>
+          </a:xfrm>
+          <a:prstGeom prst="rect">
+            <a:avLst/>
+          </a:prstGeom>
+          <a:noFill/>
+          <a:ln/>
+        </p:spPr>
+        <p:txBody>
+          <a:bodyPr wrap="square" lIns="0" tIns="0" rIns="0" bIns="0" rtlCol="0" anchor="t"/>
+          <a:lstStyle/>
+          <a:p>
+            <a:pPr algn="l" indent="0" marL="0">
+              <a:buNone/>
+            </a:pPr>
+            <a:r>
+              <a:rPr lang="en-US" sz="3200" b="1" dirty="0">
+                <a:solidFill>
+                  <a:srgbClr val="FFFFFF"/>
+                </a:solidFill>
+              </a:rPr>
+              <a:t>Discussion</a:t>
+            </a:r>
+            <a:endParaRPr lang="en-US" sz="3200" dirty="0"/>
+          </a:p>
+        </p:txBody>
+      </p:sp>
+      <p:sp>
+        <p:nvSpPr>
+          <p:cNvPr id="3" name="Text 0"/>
+          <p:cNvSpPr/>
+          <p:nvPr>
+            <p:ph idx="101" type="body" hasCustomPrompt="1"/>
+          </p:nvPr>
+        </p:nvSpPr>
+        <p:spPr>
+          <a:xfrm>
+            <a:off x="731520" y="1554480"/>
+            <a:ext cx="10698480" cy="4754880"/>
+          </a:xfrm>
+          <a:prstGeom prst="rect">
+            <a:avLst/>
+          </a:prstGeom>
+          <a:noFill/>
+          <a:ln/>
+        </p:spPr>
+        <p:txBody>
+          <a:bodyPr wrap="square" rtlCol="0" anchor="t"/>
+          <a:lstStyle/>
+          <a:p>
+            <a:pPr algn="l" marL="342900" indent="-342900">
+              <a:spcAft>
+                <a:spcPts val="1000"/>
+              </a:spcAft>
+              <a:buSzPct val="100000"/>
+              <a:buChar char="•"/>
+            </a:pPr>
+            <a:r>
+              <a:rPr lang="en-US" sz="2400" dirty="0">
+                <a:solidFill>
+                  <a:srgbClr val="FFFFFF"/>
+                </a:solidFill>
+              </a:rPr>
+              <a:t>Recall a project where people disagreed about goals or definitions. Who needed to be aligned, and what would you do differently now?</a:t>
+            </a:r>
+            <a:endParaRPr lang="en-US" sz="2400" dirty="0"/>
+          </a:p>
+          <a:p>
+            <a:pPr algn="l" marL="342900" indent="-342900">
+              <a:spcAft>
+                <a:spcPts val="1000"/>
+              </a:spcAft>
+              <a:buSzPct val="100000"/>
+              <a:buChar char="•"/>
+            </a:pPr>
+            <a:r>
+              <a:rPr lang="en-US" sz="2400" dirty="0">
+                <a:solidFill>
+                  <a:srgbClr val="FFFFFF"/>
+                </a:solidFill>
+              </a:rPr>
+              <a:t>Draw on your own experience and career, and apply today's seminar to that setting.</a:t>
+            </a:r>
+            <a:endParaRPr lang="en-US" sz="2400" dirty="0"/>
+          </a:p>
+        </p:txBody>
+      </p:sp>
+      <p:sp>
+        <p:nvSpPr>
+          <p:cNvPr id="25" name="Slide Number Placeholder 0"/>
+          <p:cNvSpPr>
+            <a:spLocks noGrp="1"/>
+          </p:cNvSpPr>
+          <p:nvPr>
+            <p:ph type="sldNum" sz="quarter" idx="4294967295"/>
+          </p:nvPr>
+        </p:nvSpPr>
+        <p:spPr>
+          <a:xfrm>
+            <a:off x="10972800" y="6400800"/>
+            <a:ext cx="548640" cy="274320"/>
+          </a:xfrm>
+          <a:prstGeom prst="rect">
+            <a:avLst/>
+          </a:prstGeom>
+          <a:extLst>
+            <a:ext uri="{C572A759-6A51-4108-AA02-DFA0A04FC94B}">
+              <ma14:wrappingTextBoxFlag xmlns:ma14="http://schemas.microsoft.com/office/mac/drawingml/2011/main" val="0"/>
+            </a:ext>
+          </a:extLst>
+        </p:spPr>
+        <p:txBody>
+          <a:bodyPr/>
+          <a:lstStyle>
+            <a:lvl1pPr>
+              <a:defRPr sz="1000">
+                <a:solidFill>
+                  <a:srgbClr val="BFBFBF"/>
+                </a:solidFill>
+              </a:defRPr>
+            </a:lvl1pPr>
+          </a:lstStyle>
+          <a:p>
+            <a:pPr algn="r"/>
+            <a:fld id="{F7021451-1387-4CA6-816F-3879F97B5CBC}" type="slidenum">
+              <a:rPr b="0" lang="en-US"/>
+              <a:t>7</a:t>
             </a:fld>
             <a:endParaRPr lang="en-US"/>
           </a:p>

--- a/management-seminars/week03_stakeholder_alignment.pptx
+++ b/management-seminars/week03_stakeholder_alignment.pptx
@@ -1619,7 +1619,7 @@
                   <a:srgbClr val="FFFFFF"/>
                 </a:solidFill>
               </a:rPr>
-              <a:t>Stakeholder Alignment Strategies</a:t>
+              <a:t>Week 3: Stakeholder Alignment Strategies</a:t>
             </a:r>
             <a:endParaRPr lang="en-US" sz="4000" dirty="0"/>
           </a:p>
